--- a/Scripts de clases/Prácticas/Revisiones/Mejoras de 4 y 5.pptx
+++ b/Scripts de clases/Prácticas/Revisiones/Mejoras de 4 y 5.pptx
@@ -118,6 +118,11 @@
       </a:defRPr>
     </a:lvl9pPr>
   </p:defaultTextStyle>
+  <p:extLst>
+    <p:ext uri="{EFAFB233-063F-42B5-8137-9DF3F51BA10A}">
+      <p15:sldGuideLst xmlns:p15="http://schemas.microsoft.com/office/powerpoint/2012/main"/>
+    </p:ext>
+  </p:extLst>
 </p:presentation>
 </file>
 
@@ -203,7 +208,7 @@
           <a:p>
             <a:fld id="{58EA02E8-5DC0-4C86-AC74-597BE27D01EE}" type="datetimeFigureOut">
               <a:rPr lang="es-AR" smtClean="0"/>
-              <a:t>19/10/2025</a:t>
+              <a:t>20/10/2025</a:t>
             </a:fld>
             <a:endParaRPr lang="es-AR"/>
           </a:p>
@@ -704,7 +709,7 @@
           <a:p>
             <a:fld id="{A725AC30-D541-493D-A958-6AE440E2CC43}" type="datetimeFigureOut">
               <a:rPr lang="es-AR" smtClean="0"/>
-              <a:t>19/10/2025</a:t>
+              <a:t>20/10/2025</a:t>
             </a:fld>
             <a:endParaRPr lang="es-AR"/>
           </a:p>
@@ -904,7 +909,7 @@
           <a:p>
             <a:fld id="{A725AC30-D541-493D-A958-6AE440E2CC43}" type="datetimeFigureOut">
               <a:rPr lang="es-AR" smtClean="0"/>
-              <a:t>19/10/2025</a:t>
+              <a:t>20/10/2025</a:t>
             </a:fld>
             <a:endParaRPr lang="es-AR"/>
           </a:p>
@@ -1114,7 +1119,7 @@
           <a:p>
             <a:fld id="{A725AC30-D541-493D-A958-6AE440E2CC43}" type="datetimeFigureOut">
               <a:rPr lang="es-AR" smtClean="0"/>
-              <a:t>19/10/2025</a:t>
+              <a:t>20/10/2025</a:t>
             </a:fld>
             <a:endParaRPr lang="es-AR"/>
           </a:p>
@@ -1314,7 +1319,7 @@
           <a:p>
             <a:fld id="{A725AC30-D541-493D-A958-6AE440E2CC43}" type="datetimeFigureOut">
               <a:rPr lang="es-AR" smtClean="0"/>
-              <a:t>19/10/2025</a:t>
+              <a:t>20/10/2025</a:t>
             </a:fld>
             <a:endParaRPr lang="es-AR"/>
           </a:p>
@@ -1590,7 +1595,7 @@
           <a:p>
             <a:fld id="{A725AC30-D541-493D-A958-6AE440E2CC43}" type="datetimeFigureOut">
               <a:rPr lang="es-AR" smtClean="0"/>
-              <a:t>19/10/2025</a:t>
+              <a:t>20/10/2025</a:t>
             </a:fld>
             <a:endParaRPr lang="es-AR"/>
           </a:p>
@@ -1858,7 +1863,7 @@
           <a:p>
             <a:fld id="{A725AC30-D541-493D-A958-6AE440E2CC43}" type="datetimeFigureOut">
               <a:rPr lang="es-AR" smtClean="0"/>
-              <a:t>19/10/2025</a:t>
+              <a:t>20/10/2025</a:t>
             </a:fld>
             <a:endParaRPr lang="es-AR"/>
           </a:p>
@@ -2273,7 +2278,7 @@
           <a:p>
             <a:fld id="{A725AC30-D541-493D-A958-6AE440E2CC43}" type="datetimeFigureOut">
               <a:rPr lang="es-AR" smtClean="0"/>
-              <a:t>19/10/2025</a:t>
+              <a:t>20/10/2025</a:t>
             </a:fld>
             <a:endParaRPr lang="es-AR"/>
           </a:p>
@@ -2415,7 +2420,7 @@
           <a:p>
             <a:fld id="{A725AC30-D541-493D-A958-6AE440E2CC43}" type="datetimeFigureOut">
               <a:rPr lang="es-AR" smtClean="0"/>
-              <a:t>19/10/2025</a:t>
+              <a:t>20/10/2025</a:t>
             </a:fld>
             <a:endParaRPr lang="es-AR"/>
           </a:p>
@@ -2528,7 +2533,7 @@
           <a:p>
             <a:fld id="{A725AC30-D541-493D-A958-6AE440E2CC43}" type="datetimeFigureOut">
               <a:rPr lang="es-AR" smtClean="0"/>
-              <a:t>19/10/2025</a:t>
+              <a:t>20/10/2025</a:t>
             </a:fld>
             <a:endParaRPr lang="es-AR"/>
           </a:p>
@@ -2841,7 +2846,7 @@
           <a:p>
             <a:fld id="{A725AC30-D541-493D-A958-6AE440E2CC43}" type="datetimeFigureOut">
               <a:rPr lang="es-AR" smtClean="0"/>
-              <a:t>19/10/2025</a:t>
+              <a:t>20/10/2025</a:t>
             </a:fld>
             <a:endParaRPr lang="es-AR"/>
           </a:p>
@@ -3130,7 +3135,7 @@
           <a:p>
             <a:fld id="{A725AC30-D541-493D-A958-6AE440E2CC43}" type="datetimeFigureOut">
               <a:rPr lang="es-AR" smtClean="0"/>
-              <a:t>19/10/2025</a:t>
+              <a:t>20/10/2025</a:t>
             </a:fld>
             <a:endParaRPr lang="es-AR"/>
           </a:p>
@@ -3373,7 +3378,7 @@
           <a:p>
             <a:fld id="{A725AC30-D541-493D-A958-6AE440E2CC43}" type="datetimeFigureOut">
               <a:rPr lang="es-AR" smtClean="0"/>
-              <a:t>19/10/2025</a:t>
+              <a:t>20/10/2025</a:t>
             </a:fld>
             <a:endParaRPr lang="es-AR"/>
           </a:p>
@@ -4540,56 +4545,36 @@
           <a:chExt cx="0" cy="0"/>
         </a:xfrm>
       </p:grpSpPr>
-      <p:sp>
-        <p:nvSpPr>
-          <p:cNvPr id="2" name="Título 1">
-            <a:extLst>
-              <a:ext uri="{FF2B5EF4-FFF2-40B4-BE49-F238E27FC236}">
-                <a16:creationId xmlns:a16="http://schemas.microsoft.com/office/drawing/2014/main" id="{97CDA4CE-13C9-9250-4730-0E1903090AC3}"/>
-              </a:ext>
-            </a:extLst>
-          </p:cNvPr>
-          <p:cNvSpPr>
-            <a:spLocks noGrp="1"/>
-          </p:cNvSpPr>
-          <p:nvPr>
-            <p:ph type="title"/>
-          </p:nvPr>
-        </p:nvSpPr>
-        <p:spPr/>
-        <p:txBody>
-          <a:bodyPr/>
-          <a:lstStyle/>
-          <a:p>
-            <a:endParaRPr lang="es-AR"/>
-          </a:p>
-        </p:txBody>
-      </p:sp>
-      <p:sp>
-        <p:nvSpPr>
-          <p:cNvPr id="3" name="Marcador de contenido 2">
-            <a:extLst>
-              <a:ext uri="{FF2B5EF4-FFF2-40B4-BE49-F238E27FC236}">
-                <a16:creationId xmlns:a16="http://schemas.microsoft.com/office/drawing/2014/main" id="{8474855E-5168-E80F-4382-D626E9D543E4}"/>
-              </a:ext>
-            </a:extLst>
-          </p:cNvPr>
-          <p:cNvSpPr>
-            <a:spLocks noGrp="1"/>
-          </p:cNvSpPr>
-          <p:nvPr>
-            <p:ph idx="1"/>
-          </p:nvPr>
-        </p:nvSpPr>
-        <p:spPr/>
-        <p:txBody>
-          <a:bodyPr/>
-          <a:lstStyle/>
-          <a:p>
-            <a:endParaRPr lang="es-AR"/>
-          </a:p>
-        </p:txBody>
-      </p:sp>
+      <p:pic>
+        <p:nvPicPr>
+          <p:cNvPr id="8" name="Imagen 7">
+            <a:extLst>
+              <a:ext uri="{FF2B5EF4-FFF2-40B4-BE49-F238E27FC236}">
+                <a16:creationId xmlns:a16="http://schemas.microsoft.com/office/drawing/2014/main" id="{46375254-78C0-416D-8DEF-92B75A1B568A}"/>
+              </a:ext>
+            </a:extLst>
+          </p:cNvPr>
+          <p:cNvPicPr>
+            <a:picLocks noChangeAspect="1"/>
+          </p:cNvPicPr>
+          <p:nvPr/>
+        </p:nvPicPr>
+        <p:blipFill>
+          <a:blip r:embed="rId2"/>
+          <a:stretch>
+            <a:fillRect/>
+          </a:stretch>
+        </p:blipFill>
+        <p:spPr>
+          <a:xfrm>
+            <a:off x="1928231" y="471074"/>
+            <a:ext cx="8335538" cy="5915851"/>
+          </a:xfrm>
+          <a:prstGeom prst="rect">
+            <a:avLst/>
+          </a:prstGeom>
+        </p:spPr>
+      </p:pic>
     </p:spTree>
     <p:extLst>
       <p:ext uri="{BB962C8B-B14F-4D97-AF65-F5344CB8AC3E}">
